--- a/M1 Course/ENG/C# as a Game Development Language.pptx
+++ b/M1 Course/ENG/C# as a Game Development Language.pptx
@@ -5637,25 +5637,8 @@
               <a:rPr lang="en-US" sz="3200" b="1" dirty="0">
                 <a:latin typeface="Verdana" panose="020B0604030504040204" pitchFamily="34" charset="0"/>
                 <a:ea typeface="Verdana" panose="020B0604030504040204" pitchFamily="34" charset="0"/>
-                <a:cs typeface="Verdana"/>
               </a:rPr>
-              <a:t>History of the language</a:t>
-            </a:r>
-            <a:r>
-              <a:rPr lang="ru-RU" sz="3200" b="1" dirty="0">
-                <a:latin typeface="Verdana" panose="020B0604030504040204" pitchFamily="34" charset="0"/>
-                <a:ea typeface="Verdana" panose="020B0604030504040204" pitchFamily="34" charset="0"/>
-                <a:cs typeface="Verdana"/>
-              </a:rPr>
-              <a:t> </a:t>
-            </a:r>
-            <a:r>
-              <a:rPr lang="en-US" sz="3200" b="1" dirty="0">
-                <a:latin typeface="Verdana" panose="020B0604030504040204" pitchFamily="34" charset="0"/>
-                <a:ea typeface="Verdana" panose="020B0604030504040204" pitchFamily="34" charset="0"/>
-                <a:cs typeface="Verdana"/>
-              </a:rPr>
-              <a:t>C#</a:t>
+              <a:t>C# Becomes Faster</a:t>
             </a:r>
             <a:endParaRPr lang="ru-RU" sz="3200" b="1" dirty="0"/>
           </a:p>
